--- a/m5/diapositivos/sessao-04-m5-f09.pptx
+++ b/m5/diapositivos/sessao-04-m5-f09.pptx
@@ -1876,7 +1876,7 @@
               <a:buNone/>
             </a:pPr>
             <a:r>
-              <a:rPr lang="en-US" sz="2300" dirty="0">
+              <a:rPr lang="en-US" sz="2300" b="1" dirty="0">
                 <a:solidFill>
                   <a:srgbClr val="F2F0EA"/>
                 </a:solidFill>
@@ -1884,7 +1884,58 @@
                 <a:ea typeface="Georgia" pitchFamily="34" charset="-122"/>
                 <a:cs typeface="Georgia" pitchFamily="34" charset="-120"/>
               </a:rPr>
-              <a:t>Cadeia da Relação, Porto: hoje Centro Português de Fotografia, no Largo Amor de Perdição, junto à Torre dos Clérigos. Aqui estiveram presos Simão (no romance) e Camilo (a dedicatória é datada da cadeia, 1861). Casa de Camilo, São Miguel de Seide, Vila Nova de Famalicão: casa-museu reconstituída, onde o escritor viveu. Quem não puder ir faz a visita pelas páginas dos dois museus, com o mesmo caderno de campo.</a:t>
+              <a:t>Cadeia da Relação</a:t>
+            </a:r>
+            <a:pPr indent="0" marL="0">
+              <a:lnSpc>
+                <a:spcPct val="120000"/>
+              </a:lnSpc>
+              <a:buNone/>
+            </a:pPr>
+            <a:r>
+              <a:rPr lang="en-US" sz="2300" dirty="0">
+                <a:solidFill>
+                  <a:srgbClr val="F2F0EA"/>
+                </a:solidFill>
+                <a:latin typeface="Georgia" pitchFamily="34" charset="0"/>
+                <a:ea typeface="Georgia" pitchFamily="34" charset="-122"/>
+                <a:cs typeface="Georgia" pitchFamily="34" charset="-120"/>
+              </a:rPr>
+              <a:t>, Porto: hoje Centro Português de Fotografia, no Largo Amor de Perdição, junto à Torre dos Clérigos. Aqui estiveram presos Simão (no romance) e Camilo (a dedicatória é datada da cadeia, 1861). </a:t>
+            </a:r>
+            <a:pPr indent="0" marL="0">
+              <a:lnSpc>
+                <a:spcPct val="120000"/>
+              </a:lnSpc>
+              <a:buNone/>
+            </a:pPr>
+            <a:r>
+              <a:rPr lang="en-US" sz="2300" b="1" dirty="0">
+                <a:solidFill>
+                  <a:srgbClr val="F2F0EA"/>
+                </a:solidFill>
+                <a:latin typeface="Georgia" pitchFamily="34" charset="0"/>
+                <a:ea typeface="Georgia" pitchFamily="34" charset="-122"/>
+                <a:cs typeface="Georgia" pitchFamily="34" charset="-120"/>
+              </a:rPr>
+              <a:t>Casa de Camilo</a:t>
+            </a:r>
+            <a:pPr indent="0" marL="0">
+              <a:lnSpc>
+                <a:spcPct val="120000"/>
+              </a:lnSpc>
+              <a:buNone/>
+            </a:pPr>
+            <a:r>
+              <a:rPr lang="en-US" sz="2300" dirty="0">
+                <a:solidFill>
+                  <a:srgbClr val="F2F0EA"/>
+                </a:solidFill>
+                <a:latin typeface="Georgia" pitchFamily="34" charset="0"/>
+                <a:ea typeface="Georgia" pitchFamily="34" charset="-122"/>
+                <a:cs typeface="Georgia" pitchFamily="34" charset="-120"/>
+              </a:rPr>
+              <a:t>, São Miguel de Seide, Vila Nova de Famalicão: casa-museu reconstituída, onde o escritor viveu. Quem não puder ir faz a visita pelas páginas dos dois museus, com o mesmo caderno de campo.</a:t>
             </a:r>
             <a:endParaRPr lang="en-US" sz="2300" dirty="0"/>
           </a:p>
